--- a/Apresentacao_Credit_Risk_v2.pptx
+++ b/Apresentacao_Credit_Risk_v2.pptx
@@ -4445,7 +4445,7 @@
                 </a:solidFill>
                 <a:latin typeface="Segoe UI"/>
               </a:rPr>
-              <a:t>Três camadas. As duas primeiras avisam cedo, olhando só a entrada; a terceira confirma — mas só quando o desfecho do crédito chega.</a:t>
+              <a:t>Três camadas olhando coisas diferentes, todo dia. Hoje elas não concordam entre si — e é exatamente aí que está a informação.</a:t>
             </a:r>
           </a:p>
         </p:txBody>
@@ -4536,8 +4536,8 @@
         </p:nvSpPr>
         <p:spPr>
           <a:xfrm>
-            <a:off x="566928" y="1993392"/>
-            <a:ext cx="3489960" cy="2286000"/>
+            <a:off x="566928" y="1874519"/>
+            <a:ext cx="3489960" cy="1874519"/>
           </a:xfrm>
           <a:prstGeom prst="roundRect">
             <a:avLst>
@@ -4582,7 +4582,7 @@
         </p:nvSpPr>
         <p:spPr>
           <a:xfrm>
-            <a:off x="768096" y="2231136"/>
+            <a:off x="768096" y="2093976"/>
             <a:ext cx="45720" cy="182880"/>
           </a:xfrm>
           <a:prstGeom prst="roundRect">
@@ -4626,8 +4626,8 @@
         </p:nvSpPr>
         <p:spPr>
           <a:xfrm>
-            <a:off x="914400" y="2212848"/>
-            <a:ext cx="2941320" cy="219456"/>
+            <a:off x="914400" y="2075688"/>
+            <a:ext cx="2941320" cy="201168"/>
           </a:xfrm>
           <a:prstGeom prst="rect">
             <a:avLst/>
@@ -4646,13 +4646,13 @@
               </a:lnSpc>
             </a:pPr>
             <a:r>
-              <a:rPr sz="1300" b="1">
+              <a:rPr sz="1200" b="1">
                 <a:solidFill>
                   <a:srgbClr val="FFFFFF"/>
                 </a:solidFill>
                 <a:latin typeface="Segoe UI"/>
               </a:rPr>
-              <a:t>Drift de dados</a:t>
+              <a:t>1 · Drift de dados</a:t>
             </a:r>
           </a:p>
         </p:txBody>
@@ -4665,8 +4665,8 @@
         </p:nvSpPr>
         <p:spPr>
           <a:xfrm>
-            <a:off x="768096" y="2615184"/>
-            <a:ext cx="3087624" cy="402336"/>
+            <a:off x="768096" y="2414016"/>
+            <a:ext cx="3087624" cy="365760"/>
           </a:xfrm>
           <a:prstGeom prst="rect">
             <a:avLst/>
@@ -4685,13 +4685,13 @@
               </a:lnSpc>
             </a:pPr>
             <a:r>
-              <a:rPr sz="2800" b="1">
+              <a:rPr sz="2600" b="1">
                 <a:solidFill>
                   <a:srgbClr val="34C7B5"/>
                 </a:solidFill>
                 <a:latin typeface="Segoe UI"/>
               </a:rPr>
-              <a:t>6 features</a:t>
+              <a:t>1 de 30</a:t>
             </a:r>
           </a:p>
         </p:txBody>
@@ -4704,8 +4704,8 @@
         </p:nvSpPr>
         <p:spPr>
           <a:xfrm>
-            <a:off x="768096" y="3108960"/>
-            <a:ext cx="3087624" cy="201168"/>
+            <a:off x="768096" y="2798064"/>
+            <a:ext cx="3087624" cy="164592"/>
           </a:xfrm>
           <a:prstGeom prst="rect">
             <a:avLst/>
@@ -4724,13 +4724,13 @@
               </a:lnSpc>
             </a:pPr>
             <a:r>
-              <a:rPr sz="1050" b="0">
+              <a:rPr sz="950" b="0">
                 <a:solidFill>
                   <a:srgbClr val="8294A8"/>
                 </a:solidFill>
                 <a:latin typeface="Segoe UI"/>
               </a:rPr>
-              <a:t>em nível severo</a:t>
+              <a:t>features em nível severo</a:t>
             </a:r>
           </a:p>
         </p:txBody>
@@ -4743,19 +4743,21 @@
         </p:nvSpPr>
         <p:spPr>
           <a:xfrm>
-            <a:off x="768096" y="3419856"/>
-            <a:ext cx="3087624" cy="9144"/>
+            <a:off x="768096" y="3017520"/>
+            <a:ext cx="1536192" cy="256032"/>
           </a:xfrm>
           <a:prstGeom prst="roundRect">
             <a:avLst>
-              <a:gd name="adj" fmla="val 0"/>
+              <a:gd name="adj" fmla="val 45000"/>
             </a:avLst>
           </a:prstGeom>
           <a:solidFill>
-            <a:srgbClr val="213753"/>
+            <a:srgbClr val="112136"/>
           </a:solidFill>
-          <a:ln>
-            <a:noFill/>
+          <a:ln w="9525">
+            <a:solidFill>
+              <a:srgbClr val="F0B429"/>
+            </a:solidFill>
           </a:ln>
           <a:effectLst/>
         </p:spPr>
@@ -4787,8 +4789,47 @@
         </p:nvSpPr>
         <p:spPr>
           <a:xfrm>
-            <a:off x="768096" y="3584448"/>
-            <a:ext cx="3087624" cy="603504"/>
+            <a:off x="768096" y="3054096"/>
+            <a:ext cx="1536192" cy="201168"/>
+          </a:xfrm>
+          <a:prstGeom prst="rect">
+            <a:avLst/>
+          </a:prstGeom>
+          <a:noFill/>
+        </p:spPr>
+        <p:txBody>
+          <a:bodyPr wrap="square" anchor="t" lIns="0" rIns="0" tIns="0" bIns="0">
+            <a:spAutoFit/>
+          </a:bodyPr>
+          <a:lstStyle/>
+          <a:p>
+            <a:pPr algn="ctr">
+              <a:lnSpc>
+                <a:spcPct val="125000"/>
+              </a:lnSpc>
+            </a:pPr>
+            <a:r>
+              <a:rPr sz="1150" b="1">
+                <a:solidFill>
+                  <a:srgbClr val="F0B429"/>
+                </a:solidFill>
+                <a:latin typeface="Segoe UI"/>
+              </a:rPr>
+              <a:t>re-treino: SIM</a:t>
+            </a:r>
+          </a:p>
+        </p:txBody>
+      </p:sp>
+      <p:sp>
+        <p:nvSpPr>
+          <p:cNvPr id="15" name="TextBox 14"/>
+          <p:cNvSpPr txBox="1"/>
+          <p:nvPr/>
+        </p:nvSpPr>
+        <p:spPr>
+          <a:xfrm>
+            <a:off x="768096" y="3364992"/>
+            <a:ext cx="3087624" cy="310896"/>
           </a:xfrm>
           <a:prstGeom prst="rect">
             <a:avLst/>
@@ -4803,31 +4844,31 @@
           <a:p>
             <a:pPr algn="l">
               <a:lnSpc>
-                <a:spcPct val="140000"/>
-              </a:lnSpc>
-            </a:pPr>
-            <a:r>
-              <a:rPr sz="1000" b="0">
+                <a:spcPct val="135000"/>
+              </a:lnSpc>
+            </a:pPr>
+            <a:r>
+              <a:rPr sz="850" b="0">
                 <a:solidFill>
                   <a:srgbClr val="B9C7D6"/>
                 </a:solidFill>
                 <a:latin typeface="Segoe UI"/>
               </a:rPr>
-              <a:t>PSI por feature entre a população de treino e a que está chegando. Limiares: 0,10 moderado · 0,25 severo.</a:t>
-            </a:r>
-          </a:p>
-        </p:txBody>
-      </p:sp>
-      <p:sp>
-        <p:nvSpPr>
-          <p:cNvPr id="15" name="Rounded Rectangle 14"/>
+              <a:t>A entrada mudou: PAYMENT_RATE com PSI 1,44. Limiares: 0,10 moderado · 0,25 severo.</a:t>
+            </a:r>
+          </a:p>
+        </p:txBody>
+      </p:sp>
+      <p:sp>
+        <p:nvSpPr>
+          <p:cNvPr id="16" name="Rounded Rectangle 15"/>
           <p:cNvSpPr/>
           <p:nvPr/>
         </p:nvSpPr>
         <p:spPr>
           <a:xfrm>
-            <a:off x="4349496" y="1993392"/>
-            <a:ext cx="3489960" cy="2286000"/>
+            <a:off x="4349496" y="1874519"/>
+            <a:ext cx="3489960" cy="1874519"/>
           </a:xfrm>
           <a:prstGeom prst="roundRect">
             <a:avLst>
@@ -4866,13 +4907,13 @@
       </p:sp>
       <p:sp>
         <p:nvSpPr>
-          <p:cNvPr id="16" name="Rounded Rectangle 15"/>
+          <p:cNvPr id="17" name="Rounded Rectangle 16"/>
           <p:cNvSpPr/>
           <p:nvPr/>
         </p:nvSpPr>
         <p:spPr>
           <a:xfrm>
-            <a:off x="4550664" y="2231136"/>
+            <a:off x="4550664" y="2093976"/>
             <a:ext cx="45720" cy="182880"/>
           </a:xfrm>
           <a:prstGeom prst="roundRect">
@@ -4881,7 +4922,7 @@
             </a:avLst>
           </a:prstGeom>
           <a:solidFill>
-            <a:srgbClr val="F0B429"/>
+            <a:srgbClr val="4A90D9"/>
           </a:solidFill>
           <a:ln>
             <a:noFill/>
@@ -4910,14 +4951,14 @@
       </p:sp>
       <p:sp>
         <p:nvSpPr>
-          <p:cNvPr id="17" name="TextBox 16"/>
-          <p:cNvSpPr txBox="1"/>
-          <p:nvPr/>
-        </p:nvSpPr>
-        <p:spPr>
-          <a:xfrm>
-            <a:off x="4696968" y="2212848"/>
-            <a:ext cx="2941320" cy="219456"/>
+          <p:cNvPr id="18" name="TextBox 17"/>
+          <p:cNvSpPr txBox="1"/>
+          <p:nvPr/>
+        </p:nvSpPr>
+        <p:spPr>
+          <a:xfrm>
+            <a:off x="4696968" y="2075688"/>
+            <a:ext cx="2941320" cy="201168"/>
           </a:xfrm>
           <a:prstGeom prst="rect">
             <a:avLst/>
@@ -4936,27 +4977,27 @@
               </a:lnSpc>
             </a:pPr>
             <a:r>
-              <a:rPr sz="1300" b="1">
+              <a:rPr sz="1200" b="1">
                 <a:solidFill>
                   <a:srgbClr val="FFFFFF"/>
                 </a:solidFill>
                 <a:latin typeface="Segoe UI"/>
               </a:rPr>
-              <a:t>Drift de predição</a:t>
-            </a:r>
-          </a:p>
-        </p:txBody>
-      </p:sp>
-      <p:sp>
-        <p:nvSpPr>
-          <p:cNvPr id="18" name="TextBox 17"/>
-          <p:cNvSpPr txBox="1"/>
-          <p:nvPr/>
-        </p:nvSpPr>
-        <p:spPr>
-          <a:xfrm>
-            <a:off x="4550664" y="2615184"/>
-            <a:ext cx="3087624" cy="402336"/>
+              <a:t>2 · Drift de predição</a:t>
+            </a:r>
+          </a:p>
+        </p:txBody>
+      </p:sp>
+      <p:sp>
+        <p:nvSpPr>
+          <p:cNvPr id="19" name="TextBox 18"/>
+          <p:cNvSpPr txBox="1"/>
+          <p:nvPr/>
+        </p:nvSpPr>
+        <p:spPr>
+          <a:xfrm>
+            <a:off x="4550664" y="2414016"/>
+            <a:ext cx="3087624" cy="365760"/>
           </a:xfrm>
           <a:prstGeom prst="rect">
             <a:avLst/>
@@ -4975,27 +5016,27 @@
               </a:lnSpc>
             </a:pPr>
             <a:r>
-              <a:rPr sz="2800" b="1">
-                <a:solidFill>
-                  <a:srgbClr val="F0B429"/>
-                </a:solidFill>
-                <a:latin typeface="Segoe UI"/>
-              </a:rPr>
-              <a:t>PSI 0,243</a:t>
-            </a:r>
-          </a:p>
-        </p:txBody>
-      </p:sp>
-      <p:sp>
-        <p:nvSpPr>
-          <p:cNvPr id="19" name="TextBox 18"/>
-          <p:cNvSpPr txBox="1"/>
-          <p:nvPr/>
-        </p:nvSpPr>
-        <p:spPr>
-          <a:xfrm>
-            <a:off x="4550664" y="3108960"/>
-            <a:ext cx="3087624" cy="201168"/>
+              <a:rPr sz="2600" b="1">
+                <a:solidFill>
+                  <a:srgbClr val="4A90D9"/>
+                </a:solidFill>
+                <a:latin typeface="Segoe UI"/>
+              </a:rPr>
+              <a:t>PSI 0,060</a:t>
+            </a:r>
+          </a:p>
+        </p:txBody>
+      </p:sp>
+      <p:sp>
+        <p:nvSpPr>
+          <p:cNvPr id="20" name="TextBox 19"/>
+          <p:cNvSpPr txBox="1"/>
+          <p:nvPr/>
+        </p:nvSpPr>
+        <p:spPr>
+          <a:xfrm>
+            <a:off x="4550664" y="2798064"/>
+            <a:ext cx="3087624" cy="164592"/>
           </a:xfrm>
           <a:prstGeom prst="rect">
             <a:avLst/>
@@ -5014,38 +5055,40 @@
               </a:lnSpc>
             </a:pPr>
             <a:r>
-              <a:rPr sz="1050" b="0">
+              <a:rPr sz="950" b="0">
                 <a:solidFill>
                   <a:srgbClr val="8294A8"/>
                 </a:solidFill>
                 <a:latin typeface="Segoe UI"/>
               </a:rPr>
-              <a:t>PD média 0,080 → 0,149</a:t>
-            </a:r>
-          </a:p>
-        </p:txBody>
-      </p:sp>
-      <p:sp>
-        <p:nvSpPr>
-          <p:cNvPr id="20" name="Rounded Rectangle 19"/>
+              <a:t>PD média 0,080 → 0,107</a:t>
+            </a:r>
+          </a:p>
+        </p:txBody>
+      </p:sp>
+      <p:sp>
+        <p:nvSpPr>
+          <p:cNvPr id="21" name="Rounded Rectangle 20"/>
           <p:cNvSpPr/>
           <p:nvPr/>
         </p:nvSpPr>
         <p:spPr>
           <a:xfrm>
-            <a:off x="4550664" y="3419856"/>
-            <a:ext cx="3087624" cy="9144"/>
+            <a:off x="4550664" y="3017520"/>
+            <a:ext cx="1536192" cy="256032"/>
           </a:xfrm>
           <a:prstGeom prst="roundRect">
             <a:avLst>
-              <a:gd name="adj" fmla="val 0"/>
+              <a:gd name="adj" fmla="val 45000"/>
             </a:avLst>
           </a:prstGeom>
           <a:solidFill>
-            <a:srgbClr val="213753"/>
+            <a:srgbClr val="112136"/>
           </a:solidFill>
-          <a:ln>
-            <a:noFill/>
+          <a:ln w="9525">
+            <a:solidFill>
+              <a:srgbClr val="3FCF8E"/>
+            </a:solidFill>
           </a:ln>
           <a:effectLst/>
         </p:spPr>
@@ -5071,14 +5114,53 @@
       </p:sp>
       <p:sp>
         <p:nvSpPr>
-          <p:cNvPr id="21" name="TextBox 20"/>
-          <p:cNvSpPr txBox="1"/>
-          <p:nvPr/>
-        </p:nvSpPr>
-        <p:spPr>
-          <a:xfrm>
-            <a:off x="4550664" y="3584448"/>
-            <a:ext cx="3087624" cy="603504"/>
+          <p:cNvPr id="22" name="TextBox 21"/>
+          <p:cNvSpPr txBox="1"/>
+          <p:nvPr/>
+        </p:nvSpPr>
+        <p:spPr>
+          <a:xfrm>
+            <a:off x="4550664" y="3054096"/>
+            <a:ext cx="1536192" cy="201168"/>
+          </a:xfrm>
+          <a:prstGeom prst="rect">
+            <a:avLst/>
+          </a:prstGeom>
+          <a:noFill/>
+        </p:spPr>
+        <p:txBody>
+          <a:bodyPr wrap="square" anchor="t" lIns="0" rIns="0" tIns="0" bIns="0">
+            <a:spAutoFit/>
+          </a:bodyPr>
+          <a:lstStyle/>
+          <a:p>
+            <a:pPr algn="ctr">
+              <a:lnSpc>
+                <a:spcPct val="125000"/>
+              </a:lnSpc>
+            </a:pPr>
+            <a:r>
+              <a:rPr sz="1150" b="1">
+                <a:solidFill>
+                  <a:srgbClr val="3FCF8E"/>
+                </a:solidFill>
+                <a:latin typeface="Segoe UI"/>
+              </a:rPr>
+              <a:t>dentro do normal</a:t>
+            </a:r>
+          </a:p>
+        </p:txBody>
+      </p:sp>
+      <p:sp>
+        <p:nvSpPr>
+          <p:cNvPr id="23" name="TextBox 22"/>
+          <p:cNvSpPr txBox="1"/>
+          <p:nvPr/>
+        </p:nvSpPr>
+        <p:spPr>
+          <a:xfrm>
+            <a:off x="4550664" y="3364992"/>
+            <a:ext cx="3087624" cy="310896"/>
           </a:xfrm>
           <a:prstGeom prst="rect">
             <a:avLst/>
@@ -5093,31 +5175,31 @@
           <a:p>
             <a:pPr algn="l">
               <a:lnSpc>
-                <a:spcPct val="140000"/>
-              </a:lnSpc>
-            </a:pPr>
-            <a:r>
-              <a:rPr sz="1000" b="0">
+                <a:spcPct val="135000"/>
+              </a:lnSpc>
+            </a:pPr>
+            <a:r>
+              <a:rPr sz="850" b="0">
                 <a:solidFill>
                   <a:srgbClr val="B9C7D6"/>
                 </a:solidFill>
                 <a:latin typeface="Segoe UI"/>
               </a:rPr>
-              <a:t>A carteira que chega ficou mais arriscada — e isso aparece antes de qualquer contrato vencer.</a:t>
-            </a:r>
-          </a:p>
-        </p:txBody>
-      </p:sp>
-      <p:sp>
-        <p:nvSpPr>
-          <p:cNvPr id="22" name="Rounded Rectangle 21"/>
+              <a:t>A PD subiu, mas a forma da distribuição quase não mudou. O modelo ainda decide parecido.</a:t>
+            </a:r>
+          </a:p>
+        </p:txBody>
+      </p:sp>
+      <p:sp>
+        <p:nvSpPr>
+          <p:cNvPr id="24" name="Rounded Rectangle 23"/>
           <p:cNvSpPr/>
           <p:nvPr/>
         </p:nvSpPr>
         <p:spPr>
           <a:xfrm>
-            <a:off x="8132064" y="1993392"/>
-            <a:ext cx="3489960" cy="2286000"/>
+            <a:off x="8132064" y="1874519"/>
+            <a:ext cx="3489960" cy="1874519"/>
           </a:xfrm>
           <a:prstGeom prst="roundRect">
             <a:avLst>
@@ -5156,13 +5238,13 @@
       </p:sp>
       <p:sp>
         <p:nvSpPr>
-          <p:cNvPr id="23" name="Rounded Rectangle 22"/>
+          <p:cNvPr id="25" name="Rounded Rectangle 24"/>
           <p:cNvSpPr/>
           <p:nvPr/>
         </p:nvSpPr>
         <p:spPr>
           <a:xfrm>
-            <a:off x="8333232" y="2231136"/>
+            <a:off x="8333232" y="2093976"/>
             <a:ext cx="45720" cy="182880"/>
           </a:xfrm>
           <a:prstGeom prst="roundRect">
@@ -5200,14 +5282,14 @@
       </p:sp>
       <p:sp>
         <p:nvSpPr>
-          <p:cNvPr id="24" name="TextBox 23"/>
-          <p:cNvSpPr txBox="1"/>
-          <p:nvPr/>
-        </p:nvSpPr>
-        <p:spPr>
-          <a:xfrm>
-            <a:off x="8479536" y="2212848"/>
-            <a:ext cx="2941320" cy="219456"/>
+          <p:cNvPr id="26" name="TextBox 25"/>
+          <p:cNvSpPr txBox="1"/>
+          <p:nvPr/>
+        </p:nvSpPr>
+        <p:spPr>
+          <a:xfrm>
+            <a:off x="8479536" y="2075688"/>
+            <a:ext cx="2941320" cy="201168"/>
           </a:xfrm>
           <a:prstGeom prst="rect">
             <a:avLst/>
@@ -5226,27 +5308,27 @@
               </a:lnSpc>
             </a:pPr>
             <a:r>
-              <a:rPr sz="1300" b="1">
+              <a:rPr sz="1200" b="1">
                 <a:solidFill>
                   <a:srgbClr val="FFFFFF"/>
                 </a:solidFill>
                 <a:latin typeface="Segoe UI"/>
               </a:rPr>
-              <a:t>Performance por safra</a:t>
-            </a:r>
-          </a:p>
-        </p:txBody>
-      </p:sp>
-      <p:sp>
-        <p:nvSpPr>
-          <p:cNvPr id="25" name="TextBox 24"/>
-          <p:cNvSpPr txBox="1"/>
-          <p:nvPr/>
-        </p:nvSpPr>
-        <p:spPr>
-          <a:xfrm>
-            <a:off x="8333232" y="2615184"/>
-            <a:ext cx="3087624" cy="402336"/>
+              <a:t>3 · Performance por safra</a:t>
+            </a:r>
+          </a:p>
+        </p:txBody>
+      </p:sp>
+      <p:sp>
+        <p:nvSpPr>
+          <p:cNvPr id="27" name="TextBox 26"/>
+          <p:cNvSpPr txBox="1"/>
+          <p:nvPr/>
+        </p:nvSpPr>
+        <p:spPr>
+          <a:xfrm>
+            <a:off x="8333232" y="2414016"/>
+            <a:ext cx="3087624" cy="365760"/>
           </a:xfrm>
           <a:prstGeom prst="rect">
             <a:avLst/>
@@ -5265,27 +5347,27 @@
               </a:lnSpc>
             </a:pPr>
             <a:r>
-              <a:rPr sz="2800" b="1">
+              <a:rPr sz="2600" b="1">
                 <a:solidFill>
                   <a:srgbClr val="F26D6D"/>
                 </a:solidFill>
                 <a:latin typeface="Segoe UI"/>
               </a:rPr>
-              <a:t>0,713</a:t>
-            </a:r>
-          </a:p>
-        </p:txBody>
-      </p:sp>
-      <p:sp>
-        <p:nvSpPr>
-          <p:cNvPr id="26" name="TextBox 25"/>
-          <p:cNvSpPr txBox="1"/>
-          <p:nvPr/>
-        </p:nvSpPr>
-        <p:spPr>
-          <a:xfrm>
-            <a:off x="8333232" y="3108960"/>
-            <a:ext cx="3087624" cy="201168"/>
+              <a:t>0,7574</a:t>
+            </a:r>
+          </a:p>
+        </p:txBody>
+      </p:sp>
+      <p:sp>
+        <p:nvSpPr>
+          <p:cNvPr id="28" name="TextBox 27"/>
+          <p:cNvSpPr txBox="1"/>
+          <p:nvPr/>
+        </p:nvSpPr>
+        <p:spPr>
+          <a:xfrm>
+            <a:off x="8333232" y="2798064"/>
+            <a:ext cx="3087624" cy="164592"/>
           </a:xfrm>
           <a:prstGeom prst="rect">
             <a:avLst/>
@@ -5304,114 +5386,31 @@
               </a:lnSpc>
             </a:pPr>
             <a:r>
-              <a:rPr sz="1050" b="0">
+              <a:rPr sz="950" b="0">
                 <a:solidFill>
                   <a:srgbClr val="8294A8"/>
                 </a:solidFill>
                 <a:latin typeface="Segoe UI"/>
               </a:rPr>
-              <a:t>abaixo do piso de 0,751</a:t>
-            </a:r>
-          </a:p>
-        </p:txBody>
-      </p:sp>
-      <p:sp>
-        <p:nvSpPr>
-          <p:cNvPr id="27" name="Rounded Rectangle 26"/>
+              <a:t>piso de alerta: 0,7514</a:t>
+            </a:r>
+          </a:p>
+        </p:txBody>
+      </p:sp>
+      <p:sp>
+        <p:nvSpPr>
+          <p:cNvPr id="29" name="Rounded Rectangle 28"/>
           <p:cNvSpPr/>
           <p:nvPr/>
         </p:nvSpPr>
         <p:spPr>
           <a:xfrm>
-            <a:off x="8333232" y="3419856"/>
-            <a:ext cx="3087624" cy="9144"/>
+            <a:off x="8333232" y="3017520"/>
+            <a:ext cx="1536192" cy="256032"/>
           </a:xfrm>
           <a:prstGeom prst="roundRect">
             <a:avLst>
-              <a:gd name="adj" fmla="val 0"/>
-            </a:avLst>
-          </a:prstGeom>
-          <a:solidFill>
-            <a:srgbClr val="213753"/>
-          </a:solidFill>
-          <a:ln>
-            <a:noFill/>
-          </a:ln>
-          <a:effectLst/>
-        </p:spPr>
-        <p:style>
-          <a:lnRef idx="1">
-            <a:schemeClr val="accent1"/>
-          </a:lnRef>
-          <a:fillRef idx="3">
-            <a:schemeClr val="accent1"/>
-          </a:fillRef>
-          <a:effectRef idx="2">
-            <a:schemeClr val="accent1"/>
-          </a:effectRef>
-          <a:fontRef idx="minor">
-            <a:schemeClr val="lt1"/>
-          </a:fontRef>
-        </p:style>
-        <p:txBody>
-          <a:bodyPr rtlCol="0" anchor="ctr"/>
-          <a:lstStyle/>
-          <a:p/>
-        </p:txBody>
-      </p:sp>
-      <p:sp>
-        <p:nvSpPr>
-          <p:cNvPr id="28" name="TextBox 27"/>
-          <p:cNvSpPr txBox="1"/>
-          <p:nvPr/>
-        </p:nvSpPr>
-        <p:spPr>
-          <a:xfrm>
-            <a:off x="8333232" y="3584448"/>
-            <a:ext cx="3087624" cy="603504"/>
-          </a:xfrm>
-          <a:prstGeom prst="rect">
-            <a:avLst/>
-          </a:prstGeom>
-          <a:noFill/>
-        </p:spPr>
-        <p:txBody>
-          <a:bodyPr wrap="square" anchor="t" lIns="0" rIns="0" tIns="0" bIns="0">
-            <a:spAutoFit/>
-          </a:bodyPr>
-          <a:lstStyle/>
-          <a:p>
-            <a:pPr algn="l">
-              <a:lnSpc>
-                <a:spcPct val="140000"/>
-              </a:lnSpc>
-            </a:pPr>
-            <a:r>
-              <a:rPr sz="1000" b="0">
-                <a:solidFill>
-                  <a:srgbClr val="B9C7D6"/>
-                </a:solidFill>
-                <a:latin typeface="Segoe UI"/>
-              </a:rPr>
-              <a:t>AUC das últimas safras: 0,776 · 0,763 · 0,819 · 0,713. Tolerância de 5% sobre o AUC de referência → alerta.</a:t>
-            </a:r>
-          </a:p>
-        </p:txBody>
-      </p:sp>
-      <p:sp>
-        <p:nvSpPr>
-          <p:cNvPr id="29" name="Rounded Rectangle 28"/>
-          <p:cNvSpPr/>
-          <p:nvPr/>
-        </p:nvSpPr>
-        <p:spPr>
-          <a:xfrm>
-            <a:off x="566928" y="4535424"/>
-            <a:ext cx="11055096" cy="1408176"/>
-          </a:xfrm>
-          <a:prstGeom prst="roundRect">
-            <a:avLst>
-              <a:gd name="adj" fmla="val 6000"/>
+              <a:gd name="adj" fmla="val 45000"/>
             </a:avLst>
           </a:prstGeom>
           <a:solidFill>
@@ -5452,8 +5451,47 @@
         </p:nvSpPr>
         <p:spPr>
           <a:xfrm>
-            <a:off x="804672" y="4736592"/>
-            <a:ext cx="10579608" cy="201168"/>
+            <a:off x="8333232" y="3054096"/>
+            <a:ext cx="1536192" cy="201168"/>
+          </a:xfrm>
+          <a:prstGeom prst="rect">
+            <a:avLst/>
+          </a:prstGeom>
+          <a:noFill/>
+        </p:spPr>
+        <p:txBody>
+          <a:bodyPr wrap="square" anchor="t" lIns="0" rIns="0" tIns="0" bIns="0">
+            <a:spAutoFit/>
+          </a:bodyPr>
+          <a:lstStyle/>
+          <a:p>
+            <a:pPr algn="ctr">
+              <a:lnSpc>
+                <a:spcPct val="125000"/>
+              </a:lnSpc>
+            </a:pPr>
+            <a:r>
+              <a:rPr sz="1150" b="1">
+                <a:solidFill>
+                  <a:srgbClr val="F26D6D"/>
+                </a:solidFill>
+                <a:latin typeface="Segoe UI"/>
+              </a:rPr>
+              <a:t>margem de 0,006</a:t>
+            </a:r>
+          </a:p>
+        </p:txBody>
+      </p:sp>
+      <p:sp>
+        <p:nvSpPr>
+          <p:cNvPr id="31" name="TextBox 30"/>
+          <p:cNvSpPr txBox="1"/>
+          <p:nvPr/>
+        </p:nvSpPr>
+        <p:spPr>
+          <a:xfrm>
+            <a:off x="8333232" y="3364992"/>
+            <a:ext cx="3087624" cy="310896"/>
           </a:xfrm>
           <a:prstGeom prst="rect">
             <a:avLst/>
@@ -5468,16 +5506,985 @@
           <a:p>
             <a:pPr algn="l">
               <a:lnSpc>
+                <a:spcPct val="135000"/>
+              </a:lnSpc>
+            </a:pPr>
+            <a:r>
+              <a:rPr sz="850" b="0">
+                <a:solidFill>
+                  <a:srgbClr val="B9C7D6"/>
+                </a:solidFill>
+                <a:latin typeface="Segoe UI"/>
+              </a:rPr>
+              <a:t>Não disparou — mas a safra 2026-08 está a seis milésimos do limite. Série: 0,776 · 0,763 · 0,819 · 0,757.</a:t>
+            </a:r>
+          </a:p>
+        </p:txBody>
+      </p:sp>
+      <p:sp>
+        <p:nvSpPr>
+          <p:cNvPr id="32" name="Rounded Rectangle 31"/>
+          <p:cNvSpPr/>
+          <p:nvPr/>
+        </p:nvSpPr>
+        <p:spPr>
+          <a:xfrm>
+            <a:off x="566928" y="3877056"/>
+            <a:ext cx="5381244" cy="2084831"/>
+          </a:xfrm>
+          <a:prstGeom prst="roundRect">
+            <a:avLst>
+              <a:gd name="adj" fmla="val 6000"/>
+            </a:avLst>
+          </a:prstGeom>
+          <a:solidFill>
+            <a:srgbClr val="112136"/>
+          </a:solidFill>
+          <a:ln w="9525">
+            <a:solidFill>
+              <a:srgbClr val="F0B429"/>
+            </a:solidFill>
+          </a:ln>
+          <a:effectLst/>
+        </p:spPr>
+        <p:style>
+          <a:lnRef idx="1">
+            <a:schemeClr val="accent1"/>
+          </a:lnRef>
+          <a:fillRef idx="3">
+            <a:schemeClr val="accent1"/>
+          </a:fillRef>
+          <a:effectRef idx="2">
+            <a:schemeClr val="accent1"/>
+          </a:effectRef>
+          <a:fontRef idx="minor">
+            <a:schemeClr val="lt1"/>
+          </a:fontRef>
+        </p:style>
+        <p:txBody>
+          <a:bodyPr rtlCol="0" anchor="ctr"/>
+          <a:lstStyle/>
+          <a:p/>
+        </p:txBody>
+      </p:sp>
+      <p:sp>
+        <p:nvSpPr>
+          <p:cNvPr id="33" name="TextBox 32"/>
+          <p:cNvSpPr txBox="1"/>
+          <p:nvPr/>
+        </p:nvSpPr>
+        <p:spPr>
+          <a:xfrm>
+            <a:off x="786384" y="4059936"/>
+            <a:ext cx="4942332" cy="182880"/>
+          </a:xfrm>
+          <a:prstGeom prst="rect">
+            <a:avLst/>
+          </a:prstGeom>
+          <a:noFill/>
+        </p:spPr>
+        <p:txBody>
+          <a:bodyPr wrap="square" anchor="t" lIns="0" rIns="0" tIns="0" bIns="0">
+            <a:spAutoFit/>
+          </a:bodyPr>
+          <a:lstStyle/>
+          <a:p>
+            <a:pPr algn="l">
+              <a:lnSpc>
                 <a:spcPct val="125000"/>
               </a:lnSpc>
             </a:pPr>
             <a:r>
               <a:rPr sz="950" b="1" spc="200">
                 <a:solidFill>
+                  <a:srgbClr val="F0B429"/>
+                </a:solidFill>
+                <a:latin typeface="Segoe UI"/>
+              </a:rPr>
+              <a:t>O ALARME SABE DISPARAR</a:t>
+            </a:r>
+          </a:p>
+        </p:txBody>
+      </p:sp>
+      <p:sp>
+        <p:nvSpPr>
+          <p:cNvPr id="34" name="TextBox 33"/>
+          <p:cNvSpPr txBox="1"/>
+          <p:nvPr/>
+        </p:nvSpPr>
+        <p:spPr>
+          <a:xfrm>
+            <a:off x="786384" y="4297680"/>
+            <a:ext cx="4942332" cy="292608"/>
+          </a:xfrm>
+          <a:prstGeom prst="rect">
+            <a:avLst/>
+          </a:prstGeom>
+          <a:noFill/>
+        </p:spPr>
+        <p:txBody>
+          <a:bodyPr wrap="square" anchor="t" lIns="0" rIns="0" tIns="0" bIns="0">
+            <a:spAutoFit/>
+          </a:bodyPr>
+          <a:lstStyle/>
+          <a:p>
+            <a:pPr algn="l">
+              <a:lnSpc>
+                <a:spcPct val="135000"/>
+              </a:lnSpc>
+            </a:pPr>
+            <a:r>
+              <a:rPr sz="900" b="0">
+                <a:solidFill>
+                  <a:srgbClr val="B9C7D6"/>
+                </a:solidFill>
+                <a:latin typeface="Segoe UI"/>
+              </a:rPr>
+              <a:t>Injetando um cenário de recessão — renda cai, scores externos pioram, atrasos sobem — as mesmas 30 features são reavaliadas:</a:t>
+            </a:r>
+          </a:p>
+        </p:txBody>
+      </p:sp>
+      <p:sp>
+        <p:nvSpPr>
+          <p:cNvPr id="35" name="TextBox 34"/>
+          <p:cNvSpPr txBox="1"/>
+          <p:nvPr/>
+        </p:nvSpPr>
+        <p:spPr>
+          <a:xfrm>
+            <a:off x="786384" y="4718304"/>
+            <a:ext cx="1463040" cy="146304"/>
+          </a:xfrm>
+          <a:prstGeom prst="rect">
+            <a:avLst/>
+          </a:prstGeom>
+          <a:noFill/>
+        </p:spPr>
+        <p:txBody>
+          <a:bodyPr wrap="square" anchor="t" lIns="0" rIns="0" tIns="0" bIns="0">
+            <a:spAutoFit/>
+          </a:bodyPr>
+          <a:lstStyle/>
+          <a:p>
+            <a:pPr algn="l">
+              <a:lnSpc>
+                <a:spcPct val="125000"/>
+              </a:lnSpc>
+            </a:pPr>
+            <a:r>
+              <a:rPr sz="800" b="0">
+                <a:solidFill>
+                  <a:srgbClr val="B9C7D6"/>
+                </a:solidFill>
+                <a:latin typeface="Segoe UI"/>
+              </a:rPr>
+              <a:t>PAYMENT_RATE</a:t>
+            </a:r>
+          </a:p>
+        </p:txBody>
+      </p:sp>
+      <p:sp>
+        <p:nvSpPr>
+          <p:cNvPr id="36" name="TextBox 35"/>
+          <p:cNvSpPr txBox="1"/>
+          <p:nvPr/>
+        </p:nvSpPr>
+        <p:spPr>
+          <a:xfrm>
+            <a:off x="2286000" y="4718304"/>
+            <a:ext cx="402336" cy="146304"/>
+          </a:xfrm>
+          <a:prstGeom prst="rect">
+            <a:avLst/>
+          </a:prstGeom>
+          <a:noFill/>
+        </p:spPr>
+        <p:txBody>
+          <a:bodyPr wrap="square" anchor="t" lIns="0" rIns="0" tIns="0" bIns="0">
+            <a:spAutoFit/>
+          </a:bodyPr>
+          <a:lstStyle/>
+          <a:p>
+            <a:pPr algn="r">
+              <a:lnSpc>
+                <a:spcPct val="125000"/>
+              </a:lnSpc>
+            </a:pPr>
+            <a:r>
+              <a:rPr sz="800" b="1">
+                <a:solidFill>
                   <a:srgbClr val="F26D6D"/>
                 </a:solidFill>
                 <a:latin typeface="Segoe UI"/>
               </a:rPr>
+              <a:t>0,86</a:t>
+            </a:r>
+          </a:p>
+        </p:txBody>
+      </p:sp>
+      <p:sp>
+        <p:nvSpPr>
+          <p:cNvPr id="37" name="TextBox 36"/>
+          <p:cNvSpPr txBox="1"/>
+          <p:nvPr/>
+        </p:nvSpPr>
+        <p:spPr>
+          <a:xfrm>
+            <a:off x="2724912" y="4718304"/>
+            <a:ext cx="438912" cy="146304"/>
+          </a:xfrm>
+          <a:prstGeom prst="rect">
+            <a:avLst/>
+          </a:prstGeom>
+          <a:noFill/>
+        </p:spPr>
+        <p:txBody>
+          <a:bodyPr wrap="square" anchor="t" lIns="0" rIns="0" tIns="0" bIns="0">
+            <a:spAutoFit/>
+          </a:bodyPr>
+          <a:lstStyle/>
+          <a:p>
+            <a:pPr algn="l">
+              <a:lnSpc>
+                <a:spcPct val="125000"/>
+              </a:lnSpc>
+            </a:pPr>
+            <a:r>
+              <a:rPr sz="700" b="0">
+                <a:solidFill>
+                  <a:srgbClr val="F26D6D"/>
+                </a:solidFill>
+                <a:latin typeface="Segoe UI"/>
+              </a:rPr>
+              <a:t>SEVERO</a:t>
+            </a:r>
+          </a:p>
+        </p:txBody>
+      </p:sp>
+      <p:sp>
+        <p:nvSpPr>
+          <p:cNvPr id="38" name="TextBox 37"/>
+          <p:cNvSpPr txBox="1"/>
+          <p:nvPr/>
+        </p:nvSpPr>
+        <p:spPr>
+          <a:xfrm>
+            <a:off x="3273552" y="4718304"/>
+            <a:ext cx="1463040" cy="146304"/>
+          </a:xfrm>
+          <a:prstGeom prst="rect">
+            <a:avLst/>
+          </a:prstGeom>
+          <a:noFill/>
+        </p:spPr>
+        <p:txBody>
+          <a:bodyPr wrap="square" anchor="t" lIns="0" rIns="0" tIns="0" bIns="0">
+            <a:spAutoFit/>
+          </a:bodyPr>
+          <a:lstStyle/>
+          <a:p>
+            <a:pPr algn="l">
+              <a:lnSpc>
+                <a:spcPct val="125000"/>
+              </a:lnSpc>
+            </a:pPr>
+            <a:r>
+              <a:rPr sz="800" b="0">
+                <a:solidFill>
+                  <a:srgbClr val="B9C7D6"/>
+                </a:solidFill>
+                <a:latin typeface="Segoe UI"/>
+              </a:rPr>
+              <a:t>AMT_INCOME_TOTAL</a:t>
+            </a:r>
+          </a:p>
+        </p:txBody>
+      </p:sp>
+      <p:sp>
+        <p:nvSpPr>
+          <p:cNvPr id="39" name="TextBox 38"/>
+          <p:cNvSpPr txBox="1"/>
+          <p:nvPr/>
+        </p:nvSpPr>
+        <p:spPr>
+          <a:xfrm>
+            <a:off x="4773168" y="4718304"/>
+            <a:ext cx="402336" cy="146304"/>
+          </a:xfrm>
+          <a:prstGeom prst="rect">
+            <a:avLst/>
+          </a:prstGeom>
+          <a:noFill/>
+        </p:spPr>
+        <p:txBody>
+          <a:bodyPr wrap="square" anchor="t" lIns="0" rIns="0" tIns="0" bIns="0">
+            <a:spAutoFit/>
+          </a:bodyPr>
+          <a:lstStyle/>
+          <a:p>
+            <a:pPr algn="r">
+              <a:lnSpc>
+                <a:spcPct val="125000"/>
+              </a:lnSpc>
+            </a:pPr>
+            <a:r>
+              <a:rPr sz="800" b="1">
+                <a:solidFill>
+                  <a:srgbClr val="F26D6D"/>
+                </a:solidFill>
+                <a:latin typeface="Segoe UI"/>
+              </a:rPr>
+              <a:t>0,84</a:t>
+            </a:r>
+          </a:p>
+        </p:txBody>
+      </p:sp>
+      <p:sp>
+        <p:nvSpPr>
+          <p:cNvPr id="40" name="TextBox 39"/>
+          <p:cNvSpPr txBox="1"/>
+          <p:nvPr/>
+        </p:nvSpPr>
+        <p:spPr>
+          <a:xfrm>
+            <a:off x="5212080" y="4718304"/>
+            <a:ext cx="438912" cy="146304"/>
+          </a:xfrm>
+          <a:prstGeom prst="rect">
+            <a:avLst/>
+          </a:prstGeom>
+          <a:noFill/>
+        </p:spPr>
+        <p:txBody>
+          <a:bodyPr wrap="square" anchor="t" lIns="0" rIns="0" tIns="0" bIns="0">
+            <a:spAutoFit/>
+          </a:bodyPr>
+          <a:lstStyle/>
+          <a:p>
+            <a:pPr algn="l">
+              <a:lnSpc>
+                <a:spcPct val="125000"/>
+              </a:lnSpc>
+            </a:pPr>
+            <a:r>
+              <a:rPr sz="700" b="0">
+                <a:solidFill>
+                  <a:srgbClr val="F26D6D"/>
+                </a:solidFill>
+                <a:latin typeface="Segoe UI"/>
+              </a:rPr>
+              <a:t>SEVERO</a:t>
+            </a:r>
+          </a:p>
+        </p:txBody>
+      </p:sp>
+      <p:sp>
+        <p:nvSpPr>
+          <p:cNvPr id="41" name="TextBox 40"/>
+          <p:cNvSpPr txBox="1"/>
+          <p:nvPr/>
+        </p:nvSpPr>
+        <p:spPr>
+          <a:xfrm>
+            <a:off x="786384" y="4937760"/>
+            <a:ext cx="1463040" cy="146304"/>
+          </a:xfrm>
+          <a:prstGeom prst="rect">
+            <a:avLst/>
+          </a:prstGeom>
+          <a:noFill/>
+        </p:spPr>
+        <p:txBody>
+          <a:bodyPr wrap="square" anchor="t" lIns="0" rIns="0" tIns="0" bIns="0">
+            <a:spAutoFit/>
+          </a:bodyPr>
+          <a:lstStyle/>
+          <a:p>
+            <a:pPr algn="l">
+              <a:lnSpc>
+                <a:spcPct val="125000"/>
+              </a:lnSpc>
+            </a:pPr>
+            <a:r>
+              <a:rPr sz="800" b="0">
+                <a:solidFill>
+                  <a:srgbClr val="B9C7D6"/>
+                </a:solidFill>
+                <a:latin typeface="Segoe UI"/>
+              </a:rPr>
+              <a:t>EXT_SOURCE_2</a:t>
+            </a:r>
+          </a:p>
+        </p:txBody>
+      </p:sp>
+      <p:sp>
+        <p:nvSpPr>
+          <p:cNvPr id="42" name="TextBox 41"/>
+          <p:cNvSpPr txBox="1"/>
+          <p:nvPr/>
+        </p:nvSpPr>
+        <p:spPr>
+          <a:xfrm>
+            <a:off x="2286000" y="4937760"/>
+            <a:ext cx="402336" cy="146304"/>
+          </a:xfrm>
+          <a:prstGeom prst="rect">
+            <a:avLst/>
+          </a:prstGeom>
+          <a:noFill/>
+        </p:spPr>
+        <p:txBody>
+          <a:bodyPr wrap="square" anchor="t" lIns="0" rIns="0" tIns="0" bIns="0">
+            <a:spAutoFit/>
+          </a:bodyPr>
+          <a:lstStyle/>
+          <a:p>
+            <a:pPr algn="r">
+              <a:lnSpc>
+                <a:spcPct val="125000"/>
+              </a:lnSpc>
+            </a:pPr>
+            <a:r>
+              <a:rPr sz="800" b="1">
+                <a:solidFill>
+                  <a:srgbClr val="F26D6D"/>
+                </a:solidFill>
+                <a:latin typeface="Segoe UI"/>
+              </a:rPr>
+              <a:t>0,70</a:t>
+            </a:r>
+          </a:p>
+        </p:txBody>
+      </p:sp>
+      <p:sp>
+        <p:nvSpPr>
+          <p:cNvPr id="43" name="TextBox 42"/>
+          <p:cNvSpPr txBox="1"/>
+          <p:nvPr/>
+        </p:nvSpPr>
+        <p:spPr>
+          <a:xfrm>
+            <a:off x="2724912" y="4937760"/>
+            <a:ext cx="438912" cy="146304"/>
+          </a:xfrm>
+          <a:prstGeom prst="rect">
+            <a:avLst/>
+          </a:prstGeom>
+          <a:noFill/>
+        </p:spPr>
+        <p:txBody>
+          <a:bodyPr wrap="square" anchor="t" lIns="0" rIns="0" tIns="0" bIns="0">
+            <a:spAutoFit/>
+          </a:bodyPr>
+          <a:lstStyle/>
+          <a:p>
+            <a:pPr algn="l">
+              <a:lnSpc>
+                <a:spcPct val="125000"/>
+              </a:lnSpc>
+            </a:pPr>
+            <a:r>
+              <a:rPr sz="700" b="0">
+                <a:solidFill>
+                  <a:srgbClr val="F26D6D"/>
+                </a:solidFill>
+                <a:latin typeface="Segoe UI"/>
+              </a:rPr>
+              <a:t>SEVERO</a:t>
+            </a:r>
+          </a:p>
+        </p:txBody>
+      </p:sp>
+      <p:sp>
+        <p:nvSpPr>
+          <p:cNvPr id="44" name="TextBox 43"/>
+          <p:cNvSpPr txBox="1"/>
+          <p:nvPr/>
+        </p:nvSpPr>
+        <p:spPr>
+          <a:xfrm>
+            <a:off x="3273552" y="4937760"/>
+            <a:ext cx="1463040" cy="146304"/>
+          </a:xfrm>
+          <a:prstGeom prst="rect">
+            <a:avLst/>
+          </a:prstGeom>
+          <a:noFill/>
+        </p:spPr>
+        <p:txBody>
+          <a:bodyPr wrap="square" anchor="t" lIns="0" rIns="0" tIns="0" bIns="0">
+            <a:spAutoFit/>
+          </a:bodyPr>
+          <a:lstStyle/>
+          <a:p>
+            <a:pPr algn="l">
+              <a:lnSpc>
+                <a:spcPct val="125000"/>
+              </a:lnSpc>
+            </a:pPr>
+            <a:r>
+              <a:rPr sz="800" b="0">
+                <a:solidFill>
+                  <a:srgbClr val="B9C7D6"/>
+                </a:solidFill>
+                <a:latin typeface="Segoe UI"/>
+              </a:rPr>
+              <a:t>EXT_SOURCE_1</a:t>
+            </a:r>
+          </a:p>
+        </p:txBody>
+      </p:sp>
+      <p:sp>
+        <p:nvSpPr>
+          <p:cNvPr id="45" name="TextBox 44"/>
+          <p:cNvSpPr txBox="1"/>
+          <p:nvPr/>
+        </p:nvSpPr>
+        <p:spPr>
+          <a:xfrm>
+            <a:off x="4773168" y="4937760"/>
+            <a:ext cx="402336" cy="146304"/>
+          </a:xfrm>
+          <a:prstGeom prst="rect">
+            <a:avLst/>
+          </a:prstGeom>
+          <a:noFill/>
+        </p:spPr>
+        <p:txBody>
+          <a:bodyPr wrap="square" anchor="t" lIns="0" rIns="0" tIns="0" bIns="0">
+            <a:spAutoFit/>
+          </a:bodyPr>
+          <a:lstStyle/>
+          <a:p>
+            <a:pPr algn="r">
+              <a:lnSpc>
+                <a:spcPct val="125000"/>
+              </a:lnSpc>
+            </a:pPr>
+            <a:r>
+              <a:rPr sz="800" b="1">
+                <a:solidFill>
+                  <a:srgbClr val="F26D6D"/>
+                </a:solidFill>
+                <a:latin typeface="Segoe UI"/>
+              </a:rPr>
+              <a:t>0,39</a:t>
+            </a:r>
+          </a:p>
+        </p:txBody>
+      </p:sp>
+      <p:sp>
+        <p:nvSpPr>
+          <p:cNvPr id="46" name="TextBox 45"/>
+          <p:cNvSpPr txBox="1"/>
+          <p:nvPr/>
+        </p:nvSpPr>
+        <p:spPr>
+          <a:xfrm>
+            <a:off x="5212080" y="4937760"/>
+            <a:ext cx="438912" cy="146304"/>
+          </a:xfrm>
+          <a:prstGeom prst="rect">
+            <a:avLst/>
+          </a:prstGeom>
+          <a:noFill/>
+        </p:spPr>
+        <p:txBody>
+          <a:bodyPr wrap="square" anchor="t" lIns="0" rIns="0" tIns="0" bIns="0">
+            <a:spAutoFit/>
+          </a:bodyPr>
+          <a:lstStyle/>
+          <a:p>
+            <a:pPr algn="l">
+              <a:lnSpc>
+                <a:spcPct val="125000"/>
+              </a:lnSpc>
+            </a:pPr>
+            <a:r>
+              <a:rPr sz="700" b="0">
+                <a:solidFill>
+                  <a:srgbClr val="F26D6D"/>
+                </a:solidFill>
+                <a:latin typeface="Segoe UI"/>
+              </a:rPr>
+              <a:t>SEVERO</a:t>
+            </a:r>
+          </a:p>
+        </p:txBody>
+      </p:sp>
+      <p:sp>
+        <p:nvSpPr>
+          <p:cNvPr id="47" name="TextBox 46"/>
+          <p:cNvSpPr txBox="1"/>
+          <p:nvPr/>
+        </p:nvSpPr>
+        <p:spPr>
+          <a:xfrm>
+            <a:off x="786384" y="5157216"/>
+            <a:ext cx="1463040" cy="146304"/>
+          </a:xfrm>
+          <a:prstGeom prst="rect">
+            <a:avLst/>
+          </a:prstGeom>
+          <a:noFill/>
+        </p:spPr>
+        <p:txBody>
+          <a:bodyPr wrap="square" anchor="t" lIns="0" rIns="0" tIns="0" bIns="0">
+            <a:spAutoFit/>
+          </a:bodyPr>
+          <a:lstStyle/>
+          <a:p>
+            <a:pPr algn="l">
+              <a:lnSpc>
+                <a:spcPct val="125000"/>
+              </a:lnSpc>
+            </a:pPr>
+            <a:r>
+              <a:rPr sz="800" b="0">
+                <a:solidFill>
+                  <a:srgbClr val="B9C7D6"/>
+                </a:solidFill>
+                <a:latin typeface="Segoe UI"/>
+              </a:rPr>
+              <a:t>ANNUITY_INCOME_PERC</a:t>
+            </a:r>
+          </a:p>
+        </p:txBody>
+      </p:sp>
+      <p:sp>
+        <p:nvSpPr>
+          <p:cNvPr id="48" name="TextBox 47"/>
+          <p:cNvSpPr txBox="1"/>
+          <p:nvPr/>
+        </p:nvSpPr>
+        <p:spPr>
+          <a:xfrm>
+            <a:off x="2286000" y="5157216"/>
+            <a:ext cx="402336" cy="146304"/>
+          </a:xfrm>
+          <a:prstGeom prst="rect">
+            <a:avLst/>
+          </a:prstGeom>
+          <a:noFill/>
+        </p:spPr>
+        <p:txBody>
+          <a:bodyPr wrap="square" anchor="t" lIns="0" rIns="0" tIns="0" bIns="0">
+            <a:spAutoFit/>
+          </a:bodyPr>
+          <a:lstStyle/>
+          <a:p>
+            <a:pPr algn="r">
+              <a:lnSpc>
+                <a:spcPct val="125000"/>
+              </a:lnSpc>
+            </a:pPr>
+            <a:r>
+              <a:rPr sz="800" b="1">
+                <a:solidFill>
+                  <a:srgbClr val="F26D6D"/>
+                </a:solidFill>
+                <a:latin typeface="Segoe UI"/>
+              </a:rPr>
+              <a:t>0,33</a:t>
+            </a:r>
+          </a:p>
+        </p:txBody>
+      </p:sp>
+      <p:sp>
+        <p:nvSpPr>
+          <p:cNvPr id="49" name="TextBox 48"/>
+          <p:cNvSpPr txBox="1"/>
+          <p:nvPr/>
+        </p:nvSpPr>
+        <p:spPr>
+          <a:xfrm>
+            <a:off x="2724912" y="5157216"/>
+            <a:ext cx="438912" cy="146304"/>
+          </a:xfrm>
+          <a:prstGeom prst="rect">
+            <a:avLst/>
+          </a:prstGeom>
+          <a:noFill/>
+        </p:spPr>
+        <p:txBody>
+          <a:bodyPr wrap="square" anchor="t" lIns="0" rIns="0" tIns="0" bIns="0">
+            <a:spAutoFit/>
+          </a:bodyPr>
+          <a:lstStyle/>
+          <a:p>
+            <a:pPr algn="l">
+              <a:lnSpc>
+                <a:spcPct val="125000"/>
+              </a:lnSpc>
+            </a:pPr>
+            <a:r>
+              <a:rPr sz="700" b="0">
+                <a:solidFill>
+                  <a:srgbClr val="F26D6D"/>
+                </a:solidFill>
+                <a:latin typeface="Segoe UI"/>
+              </a:rPr>
+              <a:t>SEVERO</a:t>
+            </a:r>
+          </a:p>
+        </p:txBody>
+      </p:sp>
+      <p:sp>
+        <p:nvSpPr>
+          <p:cNvPr id="50" name="TextBox 49"/>
+          <p:cNvSpPr txBox="1"/>
+          <p:nvPr/>
+        </p:nvSpPr>
+        <p:spPr>
+          <a:xfrm>
+            <a:off x="3273552" y="5157216"/>
+            <a:ext cx="1463040" cy="146304"/>
+          </a:xfrm>
+          <a:prstGeom prst="rect">
+            <a:avLst/>
+          </a:prstGeom>
+          <a:noFill/>
+        </p:spPr>
+        <p:txBody>
+          <a:bodyPr wrap="square" anchor="t" lIns="0" rIns="0" tIns="0" bIns="0">
+            <a:spAutoFit/>
+          </a:bodyPr>
+          <a:lstStyle/>
+          <a:p>
+            <a:pPr algn="l">
+              <a:lnSpc>
+                <a:spcPct val="125000"/>
+              </a:lnSpc>
+            </a:pPr>
+            <a:r>
+              <a:rPr sz="800" b="0">
+                <a:solidFill>
+                  <a:srgbClr val="B9C7D6"/>
+                </a:solidFill>
+                <a:latin typeface="Segoe UI"/>
+              </a:rPr>
+              <a:t>EXT_SOURCE_3</a:t>
+            </a:r>
+          </a:p>
+        </p:txBody>
+      </p:sp>
+      <p:sp>
+        <p:nvSpPr>
+          <p:cNvPr id="51" name="TextBox 50"/>
+          <p:cNvSpPr txBox="1"/>
+          <p:nvPr/>
+        </p:nvSpPr>
+        <p:spPr>
+          <a:xfrm>
+            <a:off x="4773168" y="5157216"/>
+            <a:ext cx="402336" cy="146304"/>
+          </a:xfrm>
+          <a:prstGeom prst="rect">
+            <a:avLst/>
+          </a:prstGeom>
+          <a:noFill/>
+        </p:spPr>
+        <p:txBody>
+          <a:bodyPr wrap="square" anchor="t" lIns="0" rIns="0" tIns="0" bIns="0">
+            <a:spAutoFit/>
+          </a:bodyPr>
+          <a:lstStyle/>
+          <a:p>
+            <a:pPr algn="r">
+              <a:lnSpc>
+                <a:spcPct val="125000"/>
+              </a:lnSpc>
+            </a:pPr>
+            <a:r>
+              <a:rPr sz="800" b="1">
+                <a:solidFill>
+                  <a:srgbClr val="F26D6D"/>
+                </a:solidFill>
+                <a:latin typeface="Segoe UI"/>
+              </a:rPr>
+              <a:t>0,32</a:t>
+            </a:r>
+          </a:p>
+        </p:txBody>
+      </p:sp>
+      <p:sp>
+        <p:nvSpPr>
+          <p:cNvPr id="52" name="TextBox 51"/>
+          <p:cNvSpPr txBox="1"/>
+          <p:nvPr/>
+        </p:nvSpPr>
+        <p:spPr>
+          <a:xfrm>
+            <a:off x="5212080" y="5157216"/>
+            <a:ext cx="438912" cy="146304"/>
+          </a:xfrm>
+          <a:prstGeom prst="rect">
+            <a:avLst/>
+          </a:prstGeom>
+          <a:noFill/>
+        </p:spPr>
+        <p:txBody>
+          <a:bodyPr wrap="square" anchor="t" lIns="0" rIns="0" tIns="0" bIns="0">
+            <a:spAutoFit/>
+          </a:bodyPr>
+          <a:lstStyle/>
+          <a:p>
+            <a:pPr algn="l">
+              <a:lnSpc>
+                <a:spcPct val="125000"/>
+              </a:lnSpc>
+            </a:pPr>
+            <a:r>
+              <a:rPr sz="700" b="0">
+                <a:solidFill>
+                  <a:srgbClr val="F26D6D"/>
+                </a:solidFill>
+                <a:latin typeface="Segoe UI"/>
+              </a:rPr>
+              <a:t>SEVERO</a:t>
+            </a:r>
+          </a:p>
+        </p:txBody>
+      </p:sp>
+      <p:sp>
+        <p:nvSpPr>
+          <p:cNvPr id="53" name="TextBox 52"/>
+          <p:cNvSpPr txBox="1"/>
+          <p:nvPr/>
+        </p:nvSpPr>
+        <p:spPr>
+          <a:xfrm>
+            <a:off x="786384" y="5449824"/>
+            <a:ext cx="4942332" cy="365760"/>
+          </a:xfrm>
+          <a:prstGeom prst="rect">
+            <a:avLst/>
+          </a:prstGeom>
+          <a:noFill/>
+        </p:spPr>
+        <p:txBody>
+          <a:bodyPr wrap="square" anchor="t" lIns="0" rIns="0" tIns="0" bIns="0">
+            <a:spAutoFit/>
+          </a:bodyPr>
+          <a:lstStyle/>
+          <a:p>
+            <a:pPr algn="l">
+              <a:lnSpc>
+                <a:spcPct val="135000"/>
+              </a:lnSpc>
+            </a:pPr>
+            <a:r>
+              <a:rPr sz="1000" b="1">
+                <a:solidFill>
+                  <a:srgbClr val="FFFFFF"/>
+                </a:solidFill>
+                <a:latin typeface="Segoe UI"/>
+              </a:rPr>
+              <a:t>6 severos · 1 moderado · re-treino recomendado: SIM</a:t>
+            </a:r>
+          </a:p>
+          <a:p>
+            <a:pPr algn="l">
+              <a:lnSpc>
+                <a:spcPct val="135000"/>
+              </a:lnSpc>
+              <a:spcBef>
+                <a:spcPts val="400"/>
+              </a:spcBef>
+            </a:pPr>
+            <a:r>
+              <a:rPr sz="800" b="0">
+                <a:solidFill>
+                  <a:srgbClr val="8294A8"/>
+                </a:solidFill>
+                <a:latin typeface="Segoe UI"/>
+              </a:rPr>
+              <a:t>Reproduz em 26 s:  MLOps.monitoring --data-drift --simular-choque</a:t>
+            </a:r>
+          </a:p>
+        </p:txBody>
+      </p:sp>
+      <p:sp>
+        <p:nvSpPr>
+          <p:cNvPr id="54" name="Rounded Rectangle 53"/>
+          <p:cNvSpPr/>
+          <p:nvPr/>
+        </p:nvSpPr>
+        <p:spPr>
+          <a:xfrm>
+            <a:off x="6240780" y="3877056"/>
+            <a:ext cx="5381244" cy="2084831"/>
+          </a:xfrm>
+          <a:prstGeom prst="roundRect">
+            <a:avLst>
+              <a:gd name="adj" fmla="val 6000"/>
+            </a:avLst>
+          </a:prstGeom>
+          <a:solidFill>
+            <a:srgbClr val="112136"/>
+          </a:solidFill>
+          <a:ln w="9525">
+            <a:solidFill>
+              <a:srgbClr val="F26D6D"/>
+            </a:solidFill>
+          </a:ln>
+          <a:effectLst/>
+        </p:spPr>
+        <p:style>
+          <a:lnRef idx="1">
+            <a:schemeClr val="accent1"/>
+          </a:lnRef>
+          <a:fillRef idx="3">
+            <a:schemeClr val="accent1"/>
+          </a:fillRef>
+          <a:effectRef idx="2">
+            <a:schemeClr val="accent1"/>
+          </a:effectRef>
+          <a:fontRef idx="minor">
+            <a:schemeClr val="lt1"/>
+          </a:fontRef>
+        </p:style>
+        <p:txBody>
+          <a:bodyPr rtlCol="0" anchor="ctr"/>
+          <a:lstStyle/>
+          <a:p/>
+        </p:txBody>
+      </p:sp>
+      <p:sp>
+        <p:nvSpPr>
+          <p:cNvPr id="55" name="TextBox 54"/>
+          <p:cNvSpPr txBox="1"/>
+          <p:nvPr/>
+        </p:nvSpPr>
+        <p:spPr>
+          <a:xfrm>
+            <a:off x="6460236" y="4059936"/>
+            <a:ext cx="4942332" cy="182880"/>
+          </a:xfrm>
+          <a:prstGeom prst="rect">
+            <a:avLst/>
+          </a:prstGeom>
+          <a:noFill/>
+        </p:spPr>
+        <p:txBody>
+          <a:bodyPr wrap="square" anchor="t" lIns="0" rIns="0" tIns="0" bIns="0">
+            <a:spAutoFit/>
+          </a:bodyPr>
+          <a:lstStyle/>
+          <a:p>
+            <a:pPr algn="l">
+              <a:lnSpc>
+                <a:spcPct val="125000"/>
+              </a:lnSpc>
+            </a:pPr>
+            <a:r>
+              <a:rPr sz="950" b="1" spc="200">
+                <a:solidFill>
+                  <a:srgbClr val="F26D6D"/>
+                </a:solidFill>
+                <a:latin typeface="Segoe UI"/>
+              </a:rPr>
               <a:t>O ACHADO QUE NÃO FOI SIMULAÇÃO</a:t>
             </a:r>
           </a:p>
@@ -5485,14 +6492,14 @@
       </p:sp>
       <p:sp>
         <p:nvSpPr>
-          <p:cNvPr id="31" name="TextBox 30"/>
-          <p:cNvSpPr txBox="1"/>
-          <p:nvPr/>
-        </p:nvSpPr>
-        <p:spPr>
-          <a:xfrm>
-            <a:off x="804672" y="5010912"/>
-            <a:ext cx="10579608" cy="822960"/>
+          <p:cNvPr id="56" name="TextBox 55"/>
+          <p:cNvSpPr txBox="1"/>
+          <p:nvPr/>
+        </p:nvSpPr>
+        <p:spPr>
+          <a:xfrm>
+            <a:off x="6460236" y="4315968"/>
+            <a:ext cx="4942332" cy="237744"/>
           </a:xfrm>
           <a:prstGeom prst="rect">
             <a:avLst/>
@@ -5507,39 +6514,89 @@
           <a:p>
             <a:pPr algn="l">
               <a:lnSpc>
+                <a:spcPct val="125000"/>
+              </a:lnSpc>
+            </a:pPr>
+            <a:r>
+              <a:rPr sz="1150" b="1">
+                <a:solidFill>
+                  <a:srgbClr val="FFFFFF"/>
+                </a:solidFill>
+                <a:latin typeface="Segoe UI"/>
+              </a:rPr>
+              <a:t>PAYMENT_RATE, PSI 1,44 entre o treino e a população nova</a:t>
+            </a:r>
+          </a:p>
+        </p:txBody>
+      </p:sp>
+      <p:sp>
+        <p:nvSpPr>
+          <p:cNvPr id="57" name="TextBox 56"/>
+          <p:cNvSpPr txBox="1"/>
+          <p:nvPr/>
+        </p:nvSpPr>
+        <p:spPr>
+          <a:xfrm>
+            <a:off x="6460236" y="4626864"/>
+            <a:ext cx="4942332" cy="841248"/>
+          </a:xfrm>
+          <a:prstGeom prst="rect">
+            <a:avLst/>
+          </a:prstGeom>
+          <a:noFill/>
+        </p:spPr>
+        <p:txBody>
+          <a:bodyPr wrap="square" anchor="t" lIns="0" rIns="0" tIns="0" bIns="0">
+            <a:spAutoFit/>
+          </a:bodyPr>
+          <a:lstStyle/>
+          <a:p>
+            <a:pPr algn="l">
+              <a:lnSpc>
                 <a:spcPct val="140000"/>
               </a:lnSpc>
             </a:pPr>
             <a:r>
-              <a:rPr sz="1200" b="1">
-                <a:solidFill>
-                  <a:srgbClr val="FFFFFF"/>
-                </a:solidFill>
-                <a:latin typeface="Segoe UI"/>
-              </a:rPr>
-              <a:t>PAYMENT_RATE apareceu com PSI 1,51 entre o treino e a população nova. </a:t>
-            </a:r>
-            <a:r>
-              <a:rPr sz="1100" b="0">
+              <a:rPr sz="900" b="0">
                 <a:solidFill>
                   <a:srgbClr val="B9C7D6"/>
                 </a:solidFill>
                 <a:latin typeface="Segoe UI"/>
               </a:rPr>
-              <a:t>Fomos investigar: no treino, 12% dos clientes tinham crédito de prazo muito longo — mediana de 34 anos e R$ 1,08 milhão. Na população nova esse segmento simplesmente não existe mais: zero clientes, prazo mediano caiu de 20 para 16 anos.</a:t>
-            </a:r>
-          </a:p>
+              <a:t>Fomos investigar em vez de aceitar o número. No treino, 12% dos clientes tinham crédito de prazo muito longo — mediana de 34 anos e R$ 1,08 milhão. Na população nova esse segmento não existe mais: zero clientes, e o prazo mediano caiu de 20 para 16 anos.</a:t>
+            </a:r>
+          </a:p>
+        </p:txBody>
+      </p:sp>
+      <p:sp>
+        <p:nvSpPr>
+          <p:cNvPr id="58" name="TextBox 57"/>
+          <p:cNvSpPr txBox="1"/>
+          <p:nvPr/>
+        </p:nvSpPr>
+        <p:spPr>
+          <a:xfrm>
+            <a:off x="6460236" y="5541264"/>
+            <a:ext cx="4942332" cy="310896"/>
+          </a:xfrm>
+          <a:prstGeom prst="rect">
+            <a:avLst/>
+          </a:prstGeom>
+          <a:noFill/>
+        </p:spPr>
+        <p:txBody>
+          <a:bodyPr wrap="square" anchor="t" lIns="0" rIns="0" tIns="0" bIns="0">
+            <a:spAutoFit/>
+          </a:bodyPr>
+          <a:lstStyle/>
           <a:p>
             <a:pPr algn="l">
               <a:lnSpc>
-                <a:spcPct val="140000"/>
-              </a:lnSpc>
-              <a:spcBef>
-                <a:spcPts val="600"/>
-              </a:spcBef>
-            </a:pPr>
-            <a:r>
-              <a:rPr sz="1100" b="1">
+                <a:spcPct val="135000"/>
+              </a:lnSpc>
+            </a:pPr>
+            <a:r>
+              <a:rPr sz="950" b="1">
                 <a:solidFill>
                   <a:srgbClr val="F26D6D"/>
                 </a:solidFill>

--- a/Apresentacao_Credit_Risk_v2.pptx
+++ b/Apresentacao_Credit_Risk_v2.pptx
@@ -4445,7 +4445,7 @@
                 </a:solidFill>
                 <a:latin typeface="Segoe UI"/>
               </a:rPr>
-              <a:t>Três camadas olhando coisas diferentes, todo dia. Hoje elas não concordam entre si — e é exatamente aí que está a informação.</a:t>
+              <a:t>Três camadas, todo dia. A entrada mudou há tempos; a performance só confirmou agora — é essa defasagem que elas existem para cobrir.</a:t>
             </a:r>
           </a:p>
         </p:txBody>
@@ -4854,7 +4854,7 @@
                 </a:solidFill>
                 <a:latin typeface="Segoe UI"/>
               </a:rPr>
-              <a:t>A entrada mudou: PAYMENT_RATE com PSI 1,44. Limiares: 0,10 moderado · 0,25 severo.</a:t>
+              <a:t>A entrada mudou: PAYMENT_RATE com PSI 1,48. Limiares: 0,10 moderado · 0,25 severo.</a:t>
             </a:r>
           </a:p>
         </p:txBody>
@@ -5022,7 +5022,7 @@
                 </a:solidFill>
                 <a:latin typeface="Segoe UI"/>
               </a:rPr>
-              <a:t>PSI 0,060</a:t>
+              <a:t>PSI 0,043</a:t>
             </a:r>
           </a:p>
         </p:txBody>
@@ -5061,7 +5061,7 @@
                 </a:solidFill>
                 <a:latin typeface="Segoe UI"/>
               </a:rPr>
-              <a:t>PD média 0,080 → 0,107</a:t>
+              <a:t>PD média 0,080 → 0,103</a:t>
             </a:r>
           </a:p>
         </p:txBody>
@@ -5353,7 +5353,7 @@
                 </a:solidFill>
                 <a:latin typeface="Segoe UI"/>
               </a:rPr>
-              <a:t>0,7574</a:t>
+              <a:t>0,7126</a:t>
             </a:r>
           </a:p>
         </p:txBody>
@@ -5477,7 +5477,7 @@
                 </a:solidFill>
                 <a:latin typeface="Segoe UI"/>
               </a:rPr>
-              <a:t>margem de 0,006</a:t>
+              <a:t>degradação: SIM</a:t>
             </a:r>
           </a:p>
         </p:txBody>
@@ -5516,7 +5516,7 @@
                 </a:solidFill>
                 <a:latin typeface="Segoe UI"/>
               </a:rPr>
-              <a:t>Não disparou — mas a safra 2026-08 está a seis milésimos do limite. Série: 0,776 · 0,763 · 0,819 · 0,757.</a:t>
+              <a:t>A safra 2026-08 caiu abaixo do limite. Série: 0,776 · 0,763 · 0,819 · 0,713.</a:t>
             </a:r>
           </a:p>
         </p:txBody>
@@ -5835,7 +5835,7 @@
                 </a:solidFill>
                 <a:latin typeface="Segoe UI"/>
               </a:rPr>
-              <a:t>0,84</a:t>
+              <a:t>0,71</a:t>
             </a:r>
           </a:p>
         </p:txBody>
@@ -5952,7 +5952,7 @@
                 </a:solidFill>
                 <a:latin typeface="Segoe UI"/>
               </a:rPr>
-              <a:t>0,70</a:t>
+              <a:t>0,66</a:t>
             </a:r>
           </a:p>
         </p:txBody>
@@ -6069,7 +6069,7 @@
                 </a:solidFill>
                 <a:latin typeface="Segoe UI"/>
               </a:rPr>
-              <a:t>0,39</a:t>
+              <a:t>0,37</a:t>
             </a:r>
           </a:p>
         </p:txBody>
@@ -6147,7 +6147,7 @@
                 </a:solidFill>
                 <a:latin typeface="Segoe UI"/>
               </a:rPr>
-              <a:t>ANNUITY_INCOME_PERC</a:t>
+              <a:t>EXT_SOURCE_3</a:t>
             </a:r>
           </a:p>
         </p:txBody>
@@ -6264,7 +6264,7 @@
                 </a:solidFill>
                 <a:latin typeface="Segoe UI"/>
               </a:rPr>
-              <a:t>EXT_SOURCE_3</a:t>
+              <a:t>ANNUITY_INCOME_PERC</a:t>
             </a:r>
           </a:p>
         </p:txBody>
@@ -6400,7 +6400,7 @@
                 </a:solidFill>
                 <a:latin typeface="Segoe UI"/>
               </a:rPr>
-              <a:t>Reproduz em 26 s:  MLOps.monitoring --data-drift --simular-choque</a:t>
+              <a:t>Reproduz sempre igual:  MLOps.monitoring --data-drift --simular-choque</a:t>
             </a:r>
           </a:p>
         </p:txBody>
@@ -6524,7 +6524,7 @@
                 </a:solidFill>
                 <a:latin typeface="Segoe UI"/>
               </a:rPr>
-              <a:t>PAYMENT_RATE, PSI 1,44 entre o treino e a população nova</a:t>
+              <a:t>PAYMENT_RATE, PSI 1,48 entre o treino e a população nova</a:t>
             </a:r>
           </a:p>
         </p:txBody>

--- a/Apresentacao_Credit_Risk_v2.pptx
+++ b/Apresentacao_Credit_Risk_v2.pptx
@@ -14328,7 +14328,7 @@
                 </a:solidFill>
                 <a:latin typeface="Segoe UI"/>
               </a:rPr>
-              <a:t>Drivers de risco · importância média entre os 5 folds</a:t>
+              <a:t>Drivers de risco · nº de splits, média entre os 5 folds</a:t>
             </a:r>
           </a:p>
         </p:txBody>
@@ -14494,7 +14494,7 @@
                 </a:solidFill>
                 <a:latin typeface="Segoe UI"/>
               </a:rPr>
-              <a:t>EXT_SOURCE_2</a:t>
+              <a:t>EXT_SOURCE_1</a:t>
             </a:r>
           </a:p>
         </p:txBody>
@@ -14552,7 +14552,7 @@
         <p:spPr>
           <a:xfrm>
             <a:off x="2505456" y="4379976"/>
-            <a:ext cx="3042983" cy="164592"/>
+            <a:ext cx="3128716" cy="164592"/>
           </a:xfrm>
           <a:prstGeom prst="roundRect">
             <a:avLst>
@@ -14621,7 +14621,7 @@
                 </a:solidFill>
                 <a:latin typeface="Segoe UI"/>
               </a:rPr>
-              <a:t>EXT_SOURCE_1</a:t>
+              <a:t>PAYMENT_RATE</a:t>
             </a:r>
           </a:p>
         </p:txBody>
@@ -14679,7 +14679,7 @@
         <p:spPr>
           <a:xfrm>
             <a:off x="2505456" y="4626864"/>
-            <a:ext cx="2308844" cy="164592"/>
+            <a:ext cx="2985802" cy="164592"/>
           </a:xfrm>
           <a:prstGeom prst="roundRect">
             <a:avLst>
@@ -14748,7 +14748,7 @@
                 </a:solidFill>
                 <a:latin typeface="Segoe UI"/>
               </a:rPr>
-              <a:t>PAYMENT_RATE</a:t>
+              <a:t>EXT_SOURCE_2</a:t>
             </a:r>
           </a:p>
         </p:txBody>
@@ -14806,7 +14806,7 @@
         <p:spPr>
           <a:xfrm>
             <a:off x="2505456" y="4873752"/>
-            <a:ext cx="2074267" cy="164592"/>
+            <a:ext cx="2571352" cy="164592"/>
           </a:xfrm>
           <a:prstGeom prst="roundRect">
             <a:avLst>
@@ -14933,7 +14933,7 @@
         <p:spPr>
           <a:xfrm>
             <a:off x="2505456" y="5120640"/>
-            <a:ext cx="1483481" cy="164592"/>
+            <a:ext cx="2359180" cy="164592"/>
           </a:xfrm>
           <a:prstGeom prst="roundRect">
             <a:avLst>
@@ -15002,7 +15002,7 @@
                 </a:solidFill>
                 <a:latin typeface="Segoe UI"/>
               </a:rPr>
-              <a:t>CREDIT_GOODS_PRICE_RATIO</a:t>
+              <a:t>AMT_ANNUITY</a:t>
             </a:r>
           </a:p>
         </p:txBody>
@@ -15060,7 +15060,7 @@
         <p:spPr>
           <a:xfrm>
             <a:off x="2505456" y="5367528"/>
-            <a:ext cx="1344473" cy="164592"/>
+            <a:ext cx="1634716" cy="164592"/>
           </a:xfrm>
           <a:prstGeom prst="roundRect">
             <a:avLst>
@@ -15129,7 +15129,7 @@
                 </a:solidFill>
                 <a:latin typeface="Segoe UI"/>
               </a:rPr>
-              <a:t>ANNUITY_INCOME_PERC</a:t>
+              <a:t>CREDIT_GOODS_PRICE_RATIO</a:t>
             </a:r>
           </a:p>
         </p:txBody>
@@ -15187,7 +15187,7 @@
         <p:spPr>
           <a:xfrm>
             <a:off x="2505456" y="5614416"/>
-            <a:ext cx="1203292" cy="164592"/>
+            <a:ext cx="1627020" cy="164592"/>
           </a:xfrm>
           <a:prstGeom prst="roundRect">
             <a:avLst>
